--- a/assets/pa45/P003_PA45_条件分岐_20260401.pptx
+++ b/assets/pa45/P003_PA45_条件分岐_20260401.pptx
@@ -11,19 +11,13 @@
     <p:sldId id="257" r:id="rId2"/>
     <p:sldId id="256" r:id="rId3"/>
     <p:sldId id="271" r:id="rId4"/>
-    <p:sldId id="270" r:id="rId5"/>
     <p:sldId id="259" r:id="rId6"/>
-    <p:sldId id="260" r:id="rId7"/>
     <p:sldId id="261" r:id="rId8"/>
     <p:sldId id="262" r:id="rId9"/>
-    <p:sldId id="263" r:id="rId10"/>
-    <p:sldId id="258" r:id="rId11"/>
     <p:sldId id="264" r:id="rId12"/>
     <p:sldId id="272" r:id="rId13"/>
-    <p:sldId id="265" r:id="rId14"/>
-    <p:sldId id="266" r:id="rId15"/>
     <p:sldId id="268" r:id="rId16"/>
-    <p:sldId id="267" r:id="rId17"/>
+    <p:sldId id="258" r:id="rId11"/>
     <p:sldId id="269" r:id="rId18"/>
   </p:sldIdLst>
   <p:sldSz cx="12192000" cy="6858000"/>
@@ -10153,7 +10147,7 @@
       </p:pic>
       <p:pic>
         <p:nvPicPr>
-          <p:cNvPr id="68" name="図 67" descr="￧ﾭﾉ￣ﾁﾗ￣ﾁﾄ&#10;&#10;AI 生成コンテンツは誤りを含む可能性があります。">
+          <p:cNvPr id="68" name="図 67" descr="￧ﾭﾉ￣ﾁﾗ￣ﾁﾄ  AI 生成コンテンツは誤りを含む可能性があります。">
             <a:extLst>
               <a:ext uri="{FF2B5EF4-FFF2-40B4-BE49-F238E27FC236}">
                 <a16:creationId xmlns:a16="http://schemas.microsoft.com/office/drawing/2014/main" id="{A7EF474C-C648-5EF5-1CBA-63E5B4BD8920}"/>
@@ -10648,7 +10642,7 @@
                 <a:ea typeface="Noto Sans JP" pitchFamily="34" charset="-122"/>
                 <a:cs typeface="Noto Sans JP" pitchFamily="34" charset="-120"/>
               </a:rPr>
-              <a:t>① 条件分岐は「質問」ではない</a:t>
+              <a:t>① 条件分岐を使えば、フローに"判断力"を持たせられる</a:t>
             </a:r>
             <a:endParaRPr lang="en-US" sz="2100" dirty="0"/>
           </a:p>
@@ -10687,7 +10681,7 @@
                 <a:ea typeface="Noto Sans JP" pitchFamily="34" charset="-122"/>
                 <a:cs typeface="Noto Sans JP" pitchFamily="34" charset="-120"/>
               </a:rPr>
-              <a:t> 値を比べて道を分けているだけ。</a:t>
+              <a:t> 「もしこうなら〇〇、そうでなければ××」という判断をフローに組み込める。</a:t>
             </a:r>
             <a:endParaRPr lang="en-US" sz="1800" dirty="0"/>
           </a:p>
@@ -10704,7 +10698,7 @@
                 <a:ea typeface="Noto Sans JP" pitchFamily="34" charset="-122"/>
                 <a:cs typeface="Noto Sans JP" pitchFamily="34" charset="-120"/>
               </a:rPr>
-              <a:t>Yes / No は正解・不正解ではなく、ただの「分かれ道」です。</a:t>
+              <a:t>フローが"自分で考えて動く"ようになる瞬間です。</a:t>
             </a:r>
             <a:endParaRPr lang="en-US" sz="1800" dirty="0"/>
           </a:p>
@@ -10766,7 +10760,7 @@
                 <a:ea typeface="Noto Sans JP" pitchFamily="34" charset="-122"/>
                 <a:cs typeface="Noto Sans JP" pitchFamily="34" charset="-120"/>
               </a:rPr>
-              <a:t>② Compose（作成）は「途中の確認窓」</a:t>
+              <a:t>② たった1つのConditionで、メールの内容を自動で変えられる</a:t>
             </a:r>
             <a:endParaRPr lang="en-US" sz="2100" dirty="0"/>
           </a:p>
@@ -10805,7 +10799,7 @@
                 <a:ea typeface="Noto Sans JP" pitchFamily="34" charset="-122"/>
                 <a:cs typeface="Noto Sans JP" pitchFamily="34" charset="-120"/>
               </a:rPr>
-              <a:t> 「今この値、どうなってる？」を見るための場所。</a:t>
+              <a:t> 承認メールには承認通知、否認メールには否認通知を自動で送れる。</a:t>
             </a:r>
             <a:endParaRPr lang="en-US" sz="1800" dirty="0"/>
           </a:p>
@@ -10822,7 +10816,7 @@
                 <a:ea typeface="Noto Sans JP" pitchFamily="34" charset="-122"/>
                 <a:cs typeface="Noto Sans JP" pitchFamily="34" charset="-120"/>
               </a:rPr>
-              <a:t>不安なときはとりあえず置いて、中身を確認しましょう。</a:t>
+              <a:t>場合分けの設定はConditionひとつだけ。シンプルに強力です。</a:t>
             </a:r>
             <a:endParaRPr lang="en-US" sz="1800" dirty="0"/>
           </a:p>
@@ -10884,7 +10878,7 @@
                 <a:ea typeface="Noto Sans JP" pitchFamily="34" charset="-122"/>
                 <a:cs typeface="Noto Sans JP" pitchFamily="34" charset="-120"/>
               </a:rPr>
-              <a:t>③ アクション名は「1週間後の自分へのメモ」</a:t>
+              <a:t>③ 毎回の手動チェックが不要になる―これが本当の自動化</a:t>
             </a:r>
             <a:endParaRPr lang="en-US" sz="2100" dirty="0"/>
           </a:p>
@@ -10923,7 +10917,7 @@
                 <a:ea typeface="Noto Sans JP" pitchFamily="34" charset="-122"/>
                 <a:cs typeface="Noto Sans JP" pitchFamily="34" charset="-120"/>
               </a:rPr>
-              <a:t> 機械の名前ではなく、自分が何をしているかを書く。</a:t>
+              <a:t> 条件に応じた処理が自動で動く―それが"自動化"の本質。</a:t>
             </a:r>
             <a:endParaRPr lang="en-US" sz="1800" dirty="0"/>
           </a:p>
@@ -10940,7 +10934,7 @@
                 <a:ea typeface="Noto Sans JP" pitchFamily="34" charset="-122"/>
                 <a:cs typeface="Noto Sans JP" pitchFamily="34" charset="-120"/>
               </a:rPr>
-              <a:t>「元の名前 ＋ 今やってること」が一番わかりやすいです。</a:t>
+              <a:t>今日覚えたConditionが、あなたの仕事を変えていきます。</a:t>
             </a:r>
             <a:endParaRPr lang="en-US" sz="1800" dirty="0"/>
           </a:p>
@@ -23217,7 +23211,7 @@
       </p:pic>
       <p:pic>
         <p:nvPicPr>
-          <p:cNvPr id="55" name="図 54" descr="The image depicts a person with dark hair and glasses, sitting in front of a computer, typing on a laptop.&#10;&#10;AI 生成コンテンツは誤りを含む可能性があります。">
+          <p:cNvPr id="55" name="図 54" descr="The image depicts a person with dark hair and glasses, sitting in front of a computer, typing on a laptop.  AI 生成コンテンツは誤りを含む可能性があります。">
             <a:extLst>
               <a:ext uri="{FF2B5EF4-FFF2-40B4-BE49-F238E27FC236}">
                 <a16:creationId xmlns:a16="http://schemas.microsoft.com/office/drawing/2014/main" id="{47F0CBEE-0475-F1DC-9373-7429D3A7B53E}"/>
@@ -30517,7 +30511,7 @@
               </a:rPr>
               <a:t>1以上など数値の大小で分岐</a:t>
             </a:r>
-            <a:endParaRPr lang="en-US" sz="1400" dirty="0"/>
+            <a:endParaRPr lang="en-US" sz="1600" dirty="0"/>
           </a:p>
         </p:txBody>
       </p:sp>
@@ -30760,7 +30754,7 @@
               </a:rPr>
               <a:t>件名に「緊急」が含まれるかどうかなど</a:t>
             </a:r>
-            <a:endParaRPr lang="en-US" sz="1400" dirty="0"/>
+            <a:endParaRPr lang="en-US" sz="1600" dirty="0"/>
           </a:p>
         </p:txBody>
       </p:sp>
@@ -30941,7 +30935,7 @@
               </a:rPr>
               <a:t>2つに分かれます。</a:t>
             </a:r>
-            <a:endParaRPr lang="en-US" sz="1400" dirty="0"/>
+            <a:endParaRPr lang="en-US" sz="1600" dirty="0"/>
           </a:p>
         </p:txBody>
       </p:sp>
@@ -31084,7 +31078,7 @@
               </a:rPr>
               <a:t>「もし〇〇なら〜」という日本語の感覚で条件が書けます！</a:t>
             </a:r>
-            <a:endParaRPr lang="en-US" sz="1400" dirty="0"/>
+            <a:endParaRPr lang="en-US" sz="1600" dirty="0"/>
           </a:p>
         </p:txBody>
       </p:sp>

--- a/assets/pa45/P003_PA45_条件分岐_20260401.pptx
+++ b/assets/pa45/P003_PA45_条件分岐_20260401.pptx
@@ -7057,8 +7057,8 @@
         </p:nvSpPr>
         <p:spPr>
           <a:xfrm>
-            <a:off x="10345979" y="105015"/>
-            <a:ext cx="2149754" cy="305410"/>
+            <a:off x="10000000" y="105015"/>
+            <a:ext cx="2191695" cy="305410"/>
           </a:xfrm>
           <a:prstGeom prst="rect">
             <a:avLst/>
@@ -9027,8 +9027,8 @@
         </p:nvSpPr>
         <p:spPr>
           <a:xfrm>
-            <a:off x="1076241" y="5146237"/>
-            <a:ext cx="5040000" cy="191110"/>
+            <a:off x="1076241" y="5070000"/>
+            <a:ext cx="5040000" cy="450000"/>
           </a:xfrm>
           <a:prstGeom prst="rect">
             <a:avLst/>
@@ -9038,7 +9038,7 @@
         </p:spPr>
         <p:txBody>
           <a:bodyPr wrap="square" lIns="0" tIns="0" rIns="0" bIns="0" rtlCol="0" anchor="ctr">
-            <a:normAutofit fontScale="55000" lnSpcReduction="20000"/>
+            <a:normAutofit/>
           </a:bodyPr>
           <a:lstStyle/>
           <a:p>
@@ -9046,7 +9046,7 @@
               <a:buNone/>
             </a:pPr>
             <a:r>
-              <a:rPr lang="en-US" sz="1600" b="1" dirty="0">
+              <a:rPr lang="en-US" sz="1200" b="1" dirty="0">
                 <a:solidFill>
                   <a:srgbClr val="DB2777"/>
                 </a:solidFill>
@@ -18293,7 +18293,7 @@
                 <a:ea typeface="Noto Sans JP" pitchFamily="34" charset="-122"/>
                 <a:cs typeface="Noto Sans JP" pitchFamily="34" charset="-120"/>
               </a:rPr>
-              <a:t>PA45｜第X回</a:t>
+              <a:t>PA45｜第3回</a:t>
             </a:r>
             <a:endParaRPr lang="en-US" sz="1000" dirty="0"/>
           </a:p>
@@ -25594,18 +25594,7 @@
                 <a:ea typeface="Noto Sans JP" pitchFamily="34" charset="-122"/>
                 <a:cs typeface="Noto Sans JP" pitchFamily="34" charset="-120"/>
               </a:rPr>
-              <a:t>変数の初期化と </a:t>
-            </a:r>
-            <a:r>
-              <a:rPr lang="en-US" dirty="0">
-                <a:solidFill>
-                  <a:srgbClr val="374151"/>
-                </a:solidFill>
-                <a:latin typeface="Noto Sans JP" pitchFamily="34" charset="0"/>
-                <a:ea typeface="Noto Sans JP" pitchFamily="34" charset="-122"/>
-                <a:cs typeface="Noto Sans JP" pitchFamily="34" charset="-120"/>
-              </a:rPr>
-              <a:t>Compose で確認</a:t>
+              <a:t>Conditionアクションの使い方</a:t>
             </a:r>
             <a:endParaRPr lang="en-US" dirty="0"/>
           </a:p>
@@ -28806,7 +28795,7 @@
         <p:spPr>
           <a:xfrm>
             <a:off x="1428293" y="3937406"/>
-            <a:ext cx="1664208" cy="629107"/>
+            <a:ext cx="2800000" cy="629107"/>
           </a:xfrm>
           <a:prstGeom prst="rect">
             <a:avLst/>
@@ -28815,14 +28804,16 @@
           <a:ln/>
         </p:spPr>
         <p:txBody>
-          <a:bodyPr wrap="square" lIns="0" tIns="0" rIns="0" bIns="0" rtlCol="0" anchor="t"/>
+          <a:bodyPr wrap="square" lIns="0" tIns="0" rIns="0" bIns="0" rtlCol="0" anchor="t">
+            <a:normAutofit/>
+          </a:bodyPr>
           <a:lstStyle/>
           <a:p>
             <a:pPr marL="0" indent="0" algn="ctr">
               <a:buNone/>
             </a:pPr>
             <a:r>
-              <a:rPr lang="en-US" sz="1800" b="1" dirty="0">
+              <a:rPr lang="en-US" sz="1400" b="1" dirty="0">
                 <a:solidFill>
                   <a:srgbClr val="1F2937"/>
                 </a:solidFill>
@@ -28830,16 +28821,9 @@
                 <a:ea typeface="Noto Sans JP" pitchFamily="34" charset="-122"/>
                 <a:cs typeface="Noto Sans JP" pitchFamily="34" charset="-120"/>
               </a:rPr>
-              <a:t>条件分岐とは
-何かを理解する</a:t>
-            </a:r>
-            <a:endParaRPr lang="en-US" sz="1800" dirty="0"/>
-          </a:p>
-          <a:p>
-            <a:pPr marL="0" indent="0" algn="ctr">
-              <a:buNone/>
-            </a:pPr>
-            <a:endParaRPr lang="en-US" sz="1800" dirty="0"/>
+              <a:t>条件分岐とは何かを理解する</a:t>
+            </a:r>
+            <a:endParaRPr lang="en-US" sz="1400" dirty="0"/>
           </a:p>
         </p:txBody>
       </p:sp>
@@ -28987,8 +28971,8 @@
         </p:nvSpPr>
         <p:spPr>
           <a:xfrm>
-            <a:off x="4964278" y="3937406"/>
-            <a:ext cx="2267712" cy="629107"/>
+            <a:off x="4663706" y="3937406"/>
+            <a:ext cx="2800000" cy="629107"/>
           </a:xfrm>
           <a:prstGeom prst="rect">
             <a:avLst/>
@@ -28997,14 +28981,16 @@
           <a:ln/>
         </p:spPr>
         <p:txBody>
-          <a:bodyPr wrap="square" lIns="0" tIns="0" rIns="0" bIns="0" rtlCol="0" anchor="t"/>
+          <a:bodyPr wrap="square" lIns="0" tIns="0" rIns="0" bIns="0" rtlCol="0" anchor="t">
+            <a:normAutofit/>
+          </a:bodyPr>
           <a:lstStyle/>
           <a:p>
             <a:pPr marL="0" indent="0" algn="ctr">
               <a:buNone/>
             </a:pPr>
             <a:r>
-              <a:rPr lang="en-US" sz="1800" b="1" dirty="0">
+              <a:rPr lang="en-US" sz="1400" b="1" dirty="0">
                 <a:solidFill>
                   <a:srgbClr val="1F2937"/>
                 </a:solidFill>
@@ -29012,16 +28998,9 @@
                 <a:ea typeface="Noto Sans JP" pitchFamily="34" charset="-122"/>
                 <a:cs typeface="Noto Sans JP" pitchFamily="34" charset="-120"/>
               </a:rPr>
-              <a:t>Conditionで
-条件を作る</a:t>
-            </a:r>
-            <a:endParaRPr lang="en-US" sz="1800" dirty="0"/>
-          </a:p>
-          <a:p>
-            <a:pPr marL="0" indent="0" algn="ctr">
-              <a:buNone/>
-            </a:pPr>
-            <a:endParaRPr lang="en-US" sz="1800" dirty="0"/>
+              <a:t>Conditionで条件を作る</a:t>
+            </a:r>
+            <a:endParaRPr lang="en-US" sz="1400" dirty="0"/>
           </a:p>
         </p:txBody>
       </p:sp>
@@ -29170,7 +29149,7 @@
         <p:spPr>
           <a:xfrm>
             <a:off x="9099194" y="3937406"/>
-            <a:ext cx="1664208" cy="629107"/>
+            <a:ext cx="2800000" cy="629107"/>
           </a:xfrm>
           <a:prstGeom prst="rect">
             <a:avLst/>
@@ -29179,14 +29158,16 @@
           <a:ln/>
         </p:spPr>
         <p:txBody>
-          <a:bodyPr wrap="square" lIns="0" tIns="0" rIns="0" bIns="0" rtlCol="0" anchor="t"/>
+          <a:bodyPr wrap="square" lIns="0" tIns="0" rIns="0" bIns="0" rtlCol="0" anchor="t">
+            <a:normAutofit/>
+          </a:bodyPr>
           <a:lstStyle/>
           <a:p>
             <a:pPr marL="0" indent="0" algn="ctr">
               <a:buNone/>
             </a:pPr>
             <a:r>
-              <a:rPr lang="en-US" sz="1800" b="1" dirty="0">
+              <a:rPr lang="en-US" sz="1400" b="1" dirty="0">
                 <a:solidFill>
                   <a:srgbClr val="1F2937"/>
                 </a:solidFill>
@@ -29194,16 +29175,9 @@
                 <a:ea typeface="Noto Sans JP" pitchFamily="34" charset="-122"/>
                 <a:cs typeface="Noto Sans JP" pitchFamily="34" charset="-120"/>
               </a:rPr>
-              <a:t>Yes/Noブランチで
-処理を分ける</a:t>
-            </a:r>
-            <a:endParaRPr lang="en-US" sz="1800" dirty="0"/>
-          </a:p>
-          <a:p>
-            <a:pPr marL="0" indent="0" algn="ctr">
-              <a:buNone/>
-            </a:pPr>
-            <a:endParaRPr lang="en-US" sz="1800" dirty="0"/>
+              <a:t>Yes/Noブランチで処理を分ける</a:t>
+            </a:r>
+            <a:endParaRPr lang="en-US" sz="1400" dirty="0"/>
           </a:p>
         </p:txBody>
       </p:sp>

--- a/assets/pa45/P003_PA45_条件分岐_20260401.pptx
+++ b/assets/pa45/P003_PA45_条件分岐_20260401.pptx
@@ -15098,7 +15098,7 @@
               <a:buNone/>
             </a:pPr>
             <a:r>
-              <a:rPr lang="en-US" sz="2000" b="1" dirty="0">
+              <a:rPr lang="en-US" sz="1600" b="1" dirty="0">
                 <a:solidFill>
                   <a:srgbClr val="A78BFA"/>
                 </a:solidFill>
@@ -15106,7 +15106,7 @@
                 <a:ea typeface="Noto Sans JP" pitchFamily="34" charset="-122"/>
                 <a:cs typeface="Noto Sans JP" pitchFamily="34" charset="-120"/>
               </a:rPr>
-              <a:t>Flow Image</a:t>
+              <a:t>≥ 5件？</a:t>
             </a:r>
             <a:endParaRPr lang="en-US" sz="2000" dirty="0"/>
           </a:p>
@@ -15508,7 +15508,7 @@
               <a:buNone/>
             </a:pPr>
             <a:r>
-              <a:rPr lang="en-US" sz="2000" b="1" dirty="0">
+              <a:rPr lang="en-US" sz="1600" b="1" dirty="0">
                 <a:solidFill>
                   <a:srgbClr val="34D399"/>
                 </a:solidFill>
@@ -15516,7 +15516,7 @@
                 <a:ea typeface="Noto Sans JP" pitchFamily="34" charset="-122"/>
                 <a:cs typeface="Noto Sans JP" pitchFamily="34" charset="-120"/>
               </a:rPr>
-              <a:t>Flow Image</a:t>
+              <a:t>= 承認？</a:t>
             </a:r>
             <a:endParaRPr lang="en-US" sz="2000" dirty="0"/>
           </a:p>
@@ -15918,7 +15918,7 @@
               <a:buNone/>
             </a:pPr>
             <a:r>
-              <a:rPr lang="en-US" sz="2000" b="1" dirty="0">
+              <a:rPr lang="en-US" sz="1600" b="1" dirty="0">
                 <a:solidFill>
                   <a:srgbClr val="60A5FA"/>
                 </a:solidFill>
@@ -15926,7 +15926,7 @@
                 <a:ea typeface="Noto Sans JP" pitchFamily="34" charset="-122"/>
                 <a:cs typeface="Noto Sans JP" pitchFamily="34" charset="-120"/>
               </a:rPr>
-              <a:t>Flow Image</a:t>
+              <a:t>≥ 目標？</a:t>
             </a:r>
             <a:endParaRPr lang="en-US" sz="2000" dirty="0"/>
           </a:p>
